--- a/발표자료/LangChain_마이그레이션_도우미_발표.pptx
+++ b/발표자료/LangChain_마이그레이션_도우미_발표.pptx
@@ -1625,7 +1625,7 @@
           </a:p>
           <a:p>
             <a:r>
-              <a:t>셋째, 검사기가 놓친 경우도 찾았습니다. 옛 버전으로 되돌릴 때도 1.x 기준으로 검사하고 있었습니다. 버전별 도구 목록은 이미 있어서 연결만 하면 됩니다.</a:t>
+              <a:t>셋째, 검사기가 놓친 경우도 찾았습니다. 결과를 ['text']로 잘못 꺼내는 코드는 평가 직후 3번이 바로 고쳤습니다. 옛 버전으로 되돌릴 때도 1.x 기준으로 검사하는 부분은 남아 있습니다. 버전별 도구 목록은 이미 있어서 연결만 하면 됩니다.</a:t>
             </a:r>
           </a:p>
           <a:p>
@@ -2954,7 +2954,7 @@
           </a:p>
           <a:p>
             <a:r>
-              <a:t>기다리는 동안 지금 어느 단계인지, 검사에서 떨어져 다시 고치는 중인지가 실시간으로 보입니다.</a:t>
+              <a:t>기다리는 동안 지금 어느 단계인지, 어떤 근거를 찾았고 어느 줄을 고쳤는지, 검사에서 떨어져 다시 고치는 중인지가 실시간으로 보이고, 끝나면 그 과정이 답 위에 남습니다.</a:t>
             </a:r>
           </a:p>
           <a:p>
@@ -2965,6 +2965,11 @@
           <a:p>
             <a:r>
               <a:t>바뀐 코드와 변경 리포트는 파일로 내려받을 수 있고, 실패하면 버튼 하나로 다시 시도할 수 있습니다.</a:t>
+            </a:r>
+          </a:p>
+          <a:p>
+            <a:r>
+              <a:t>같은 대화 안에서는 앞에서 한 말을 기억해서, 이어서 물어봐도 맥락을 이어 갑니다.</a:t>
             </a:r>
           </a:p>
           <a:p/>
@@ -6120,7 +6125,7 @@
                 <a:ea typeface="맑은 고딕"/>
                 <a:cs typeface="맑은 고딕"/>
               </a:rPr>
-              <a:t>옛 버전 코드를 원하는 버전에서 돌아가는 코드로, 근거와 검증까지 함께</a:t>
+              <a:t>Langration · 옛 버전 코드를 원하는 버전에서 돌아가는 코드로, 근거와 검증까지 함께</a:t>
             </a:r>
           </a:p>
         </p:txBody>
@@ -13862,7 +13867,7 @@
                 <a:ea typeface="맑은 고딕"/>
                 <a:cs typeface="맑은 고딕"/>
               </a:rPr>
-              <a:t>['text'] 꺼내기, 0.x 되돌리기를 1.x 기준으로 검사해 놓침.</a:t>
+              <a:t>['text'] 꺼내기는 평가 직후 3번이 고침 ✅. 0.x 되돌리기를 1.x 기준으로 검사하는 건 남음.</a:t>
             </a:r>
           </a:p>
           <a:p>
@@ -13880,7 +13885,7 @@
                 <a:ea typeface="맑은 고딕"/>
                 <a:cs typeface="맑은 고딕"/>
               </a:rPr>
-              <a:t>→ 목표 버전별 도구 목록으로 검사</a:t>
+              <a:t>→ 목표 버전별 도구 목록으로</a:t>
             </a:r>
           </a:p>
         </p:txBody>
@@ -14756,7 +14761,7 @@
                           <a:latin typeface="맑은 고딕"/>
                           <a:ea typeface="맑은 고딕"/>
                         </a:rPr>
-                        <a:t>③ 목표 버전별 검사 · ['text'] 검사 · 실행 테스트</a:t>
+                        <a:t>③ 목표 버전별 검사 · 실행 테스트 (['text'] 검사 ✅)</a:t>
                       </a:r>
                     </a:p>
                   </a:txBody>
@@ -28975,7 +28980,7 @@
                 <a:ea typeface="맑은 고딕"/>
                 <a:cs typeface="맑은 고딕"/>
               </a:rPr>
-              <a:t>진행 단계 실시간</a:t>
+              <a:t>진행 과정 상세</a:t>
             </a:r>
           </a:p>
         </p:txBody>
@@ -29016,7 +29021,7 @@
                 <a:ea typeface="맑은 고딕"/>
                 <a:cs typeface="맑은 고딕"/>
               </a:rPr>
-              <a:t>찾기 → 근거 → 고치기 → 검사 (다시 시도까지)</a:t>
+              <a:t>근거 · 바뀐 줄 · 검사 이유, 답 위에 남김</a:t>
             </a:r>
           </a:p>
         </p:txBody>
@@ -29326,7 +29331,7 @@
                 <a:ea typeface="맑은 고딕"/>
                 <a:cs typeface="맑은 고딕"/>
               </a:rPr>
-              <a:t>대화 저장 · 예제 30개</a:t>
+              <a:t>대화 맥락 · 저장</a:t>
             </a:r>
           </a:p>
         </p:txBody>
@@ -29367,7 +29372,7 @@
                 <a:ea typeface="맑은 고딕"/>
                 <a:cs typeface="맑은 고딕"/>
               </a:rPr>
-              <a:t>새 대화마다 세션, 사이드바 예제 바로 보내기</a:t>
+              <a:t>앞 대화 기억 · TiDB 저장 · 예제 30개</a:t>
             </a:r>
           </a:p>
         </p:txBody>
